--- a/assets/powerpoints/module-n2-bonjour/A1-bonjour-madame-roy.pptx
+++ b/assets/powerpoints/module-n2-bonjour/A1-bonjour-madame-roy.pptx
@@ -12019,7 +12019,43 @@
                 </a:solidFill>
                 <a:latin typeface="Verdana"/>
               </a:rPr>
-              <a:t>Sans eux, l'échange s'arrête après deux phrases. On répond d'abord — « ça va bien, merci » — puis on renvoie la question : « &lt;b&gt;et vous&lt;/b&gt; ? » à une personne qu'on vouvoie, « &lt;b&gt;et toi&lt;/b&gt; ? » à un ami.</a:t>
+              <a:t>Sans eux, l'échange s'arrête après deux phrases. On répond d'abord — « ça va bien, merci » — puis on renvoie la question : « </a:t>
+            </a:r>
+            <a:r>
+              <a:rPr sz="2000" b="1" i="0">
+                <a:solidFill>
+                  <a:srgbClr val="4B4F52"/>
+                </a:solidFill>
+                <a:latin typeface="Verdana"/>
+              </a:rPr>
+              <a:t>et vous</a:t>
+            </a:r>
+            <a:r>
+              <a:rPr sz="2000" b="0" i="0">
+                <a:solidFill>
+                  <a:srgbClr val="4B4F52"/>
+                </a:solidFill>
+                <a:latin typeface="Verdana"/>
+              </a:rPr>
+              <a:t> ? » à une personne qu'on vouvoie, « </a:t>
+            </a:r>
+            <a:r>
+              <a:rPr sz="2000" b="1" i="0">
+                <a:solidFill>
+                  <a:srgbClr val="4B4F52"/>
+                </a:solidFill>
+                <a:latin typeface="Verdana"/>
+              </a:rPr>
+              <a:t>et toi</a:t>
+            </a:r>
+            <a:r>
+              <a:rPr sz="2000" b="0" i="0">
+                <a:solidFill>
+                  <a:srgbClr val="4B4F52"/>
+                </a:solidFill>
+                <a:latin typeface="Verdana"/>
+              </a:rPr>
+              <a:t> ? » à un ami.</a:t>
             </a:r>
           </a:p>
         </p:txBody>
